--- a/public/decks/Travidz_Elevator_Pitch_v5.pptx
+++ b/public/decks/Travidz_Elevator_Pitch_v5.pptx
@@ -3467,7 +3467,46 @@
       </p:sp>
       <p:sp>
         <p:nvSpPr>
-          <p:cNvPr id="76" name="Shape 73"/>
+          <p:cNvPr id="76" name="Text 73"/>
+          <p:cNvSpPr/>
+          <p:nvPr/>
+        </p:nvSpPr>
+        <p:spPr>
+          <a:xfrm>
+            <a:off x="8153248" y="3621024"/>
+            <a:ext cx="3764128" cy="237744"/>
+          </a:xfrm>
+          <a:prstGeom prst="rect">
+            <a:avLst/>
+          </a:prstGeom>
+          <a:noFill/>
+          <a:ln/>
+        </p:spPr>
+        <p:txBody>
+          <a:bodyPr wrap="square" rtlCol="0" anchor="ctr"/>
+          <a:lstStyle/>
+          <a:p>
+            <a:pPr indent="0" marL="0">
+              <a:buNone/>
+            </a:pPr>
+            <a:r>
+              <a:rPr lang="en-US" sz="950" dirty="0">
+                <a:solidFill>
+                  <a:srgbClr val="F8FAFC"/>
+                </a:solidFill>
+                <a:latin typeface="Calibri" pitchFamily="34" charset="0"/>
+                <a:ea typeface="Calibri" pitchFamily="34" charset="-122"/>
+                <a:cs typeface="Calibri" pitchFamily="34" charset="-120"/>
+              </a:rPr>
+              <a:t>• EBITDA breakeven M48 · Y1 EBITDA −£1.56M · £2.5M covers peak deficit +£181k</a:t>
+            </a:r>
+            <a:endParaRPr lang="en-US" sz="950" dirty="0"/>
+          </a:p>
+        </p:txBody>
+      </p:sp>
+      <p:sp>
+        <p:nvSpPr>
+          <p:cNvPr id="77" name="Shape 74"/>
           <p:cNvSpPr/>
           <p:nvPr/>
         </p:nvSpPr>
@@ -3494,7 +3533,7 @@
       </p:sp>
       <p:sp>
         <p:nvSpPr>
-          <p:cNvPr id="77" name="Shape 74"/>
+          <p:cNvPr id="78" name="Shape 75"/>
           <p:cNvSpPr/>
           <p:nvPr/>
         </p:nvSpPr>
@@ -3519,7 +3558,7 @@
       </p:sp>
       <p:sp>
         <p:nvSpPr>
-          <p:cNvPr id="78" name="Text 75"/>
+          <p:cNvPr id="79" name="Text 76"/>
           <p:cNvSpPr/>
           <p:nvPr/>
         </p:nvSpPr>
@@ -3558,7 +3597,7 @@
       </p:sp>
       <p:sp>
         <p:nvSpPr>
-          <p:cNvPr id="79" name="Shape 76"/>
+          <p:cNvPr id="80" name="Shape 77"/>
           <p:cNvSpPr/>
           <p:nvPr/>
         </p:nvSpPr>
@@ -3585,7 +3624,7 @@
       </p:sp>
       <p:sp>
         <p:nvSpPr>
-          <p:cNvPr id="80" name="Text 77"/>
+          <p:cNvPr id="81" name="Text 78"/>
           <p:cNvSpPr/>
           <p:nvPr/>
         </p:nvSpPr>
@@ -3624,7 +3663,7 @@
       </p:sp>
       <p:sp>
         <p:nvSpPr>
-          <p:cNvPr id="81" name="Text 78"/>
+          <p:cNvPr id="82" name="Text 79"/>
           <p:cNvSpPr/>
           <p:nvPr/>
         </p:nvSpPr>
@@ -3663,7 +3702,7 @@
       </p:sp>
       <p:sp>
         <p:nvSpPr>
-          <p:cNvPr id="82" name="Shape 79"/>
+          <p:cNvPr id="83" name="Shape 80"/>
           <p:cNvSpPr/>
           <p:nvPr/>
         </p:nvSpPr>
@@ -3690,7 +3729,7 @@
       </p:sp>
       <p:sp>
         <p:nvSpPr>
-          <p:cNvPr id="83" name="Text 80"/>
+          <p:cNvPr id="84" name="Text 81"/>
           <p:cNvSpPr/>
           <p:nvPr/>
         </p:nvSpPr>
@@ -3729,7 +3768,7 @@
       </p:sp>
       <p:sp>
         <p:nvSpPr>
-          <p:cNvPr id="84" name="Text 81"/>
+          <p:cNvPr id="85" name="Text 82"/>
           <p:cNvSpPr/>
           <p:nvPr/>
         </p:nvSpPr>
@@ -3768,7 +3807,7 @@
       </p:sp>
       <p:sp>
         <p:nvSpPr>
-          <p:cNvPr id="85" name="Shape 82"/>
+          <p:cNvPr id="86" name="Shape 83"/>
           <p:cNvSpPr/>
           <p:nvPr/>
         </p:nvSpPr>
@@ -3795,7 +3834,7 @@
       </p:sp>
       <p:sp>
         <p:nvSpPr>
-          <p:cNvPr id="86" name="Text 83"/>
+          <p:cNvPr id="87" name="Text 84"/>
           <p:cNvSpPr/>
           <p:nvPr/>
         </p:nvSpPr>
@@ -3834,7 +3873,7 @@
       </p:sp>
       <p:sp>
         <p:nvSpPr>
-          <p:cNvPr id="87" name="Text 84"/>
+          <p:cNvPr id="88" name="Text 85"/>
           <p:cNvSpPr/>
           <p:nvPr/>
         </p:nvSpPr>

--- a/public/decks/Travidz_Elevator_Pitch_v5.pptx
+++ b/public/decks/Travidz_Elevator_Pitch_v5.pptx
@@ -3498,7 +3498,7 @@
                 <a:ea typeface="Calibri" pitchFamily="34" charset="-122"/>
                 <a:cs typeface="Calibri" pitchFamily="34" charset="-120"/>
               </a:rPr>
-              <a:t>• EBITDA breakeven M48 · Y1 EBITDA −£1.56M · £2.5M covers peak deficit +£181k</a:t>
+              <a:t>• EBITDA breakeven M48 · Y1 EBITDA −£1.56M · +£181k cash cushion</a:t>
             </a:r>
             <a:endParaRPr lang="en-US" sz="950" dirty="0"/>
           </a:p>

--- a/public/decks/Travidz_Elevator_Pitch_v5.pptx
+++ b/public/decks/Travidz_Elevator_Pitch_v5.pptx
@@ -3498,7 +3498,7 @@
                 <a:ea typeface="Calibri" pitchFamily="34" charset="-122"/>
                 <a:cs typeface="Calibri" pitchFamily="34" charset="-120"/>
               </a:rPr>
-              <a:t>• EBITDA breakeven M48 · Y1 EBITDA −£1.56M · +£181k cash cushion</a:t>
+              <a:t>• Breakeven M48 · Y1 −£1.56M · +£181k cushion</a:t>
             </a:r>
             <a:endParaRPr lang="en-US" sz="950" dirty="0"/>
           </a:p>
